--- a/output/archive/QuenverellData/engagements/qv.11.073/readouts/rc3-rnaseq-batch-model-v4.pptx
+++ b/output/archive/QuenverellData/engagements/qv.11.073/readouts/rc3-rnaseq-batch-model-v4.pptx
@@ -6042,7 +6042,7 @@
               <a:rPr sz="2000">
                 <a:latin typeface="Times New Roman"/>
               </a:rPr>
-              <a:t>Supplied data drop → identifier reconciliation → data acceptance.</a:t>
+              <a:t>Client data drop → identifier reconciliation → data acceptance.</a:t>
             </a:r>
           </a:p>
           <a:p>
